--- a/weekly_report_template/out/التقرير_الأسبوعي_قالب_مختصر.pptx
+++ b/weekly_report_template/out/التقرير_الأسبوعي_قالب_مختصر.pptx
@@ -14,7 +14,7 @@
     <a:defPPr>
       <a:defRPr lang="ar-SA"/>
     </a:defPPr>
-    <a:lvl1pPr marL="0" algn="l" defTabSz="457200" rtl="0" eaLnBrk="1" latinLnBrk="0" hangingPunct="1">
+    <a:lvl1pPr marL="0" algn="r" defTabSz="457200" rtl="1" eaLnBrk="1" latinLnBrk="0" hangingPunct="1">
       <a:defRPr sz="1800" kern="1200" lang="ar-SA">
         <a:solidFill>
           <a:schemeClr val="tx1"/>
@@ -24,7 +24,7 @@
         <a:cs typeface="+mn-cs"/>
       </a:defRPr>
     </a:lvl1pPr>
-    <a:lvl2pPr marL="457200" algn="l" defTabSz="457200" rtl="0" eaLnBrk="1" latinLnBrk="0" hangingPunct="1">
+    <a:lvl2pPr marL="457200" algn="r" defTabSz="457200" rtl="1" eaLnBrk="1" latinLnBrk="0" hangingPunct="1">
       <a:defRPr sz="1800" kern="1200" lang="ar-SA">
         <a:solidFill>
           <a:schemeClr val="tx1"/>
@@ -34,7 +34,7 @@
         <a:cs typeface="+mn-cs"/>
       </a:defRPr>
     </a:lvl2pPr>
-    <a:lvl3pPr marL="914400" algn="l" defTabSz="457200" rtl="0" eaLnBrk="1" latinLnBrk="0" hangingPunct="1">
+    <a:lvl3pPr marL="914400" algn="r" defTabSz="457200" rtl="1" eaLnBrk="1" latinLnBrk="0" hangingPunct="1">
       <a:defRPr sz="1800" kern="1200" lang="ar-SA">
         <a:solidFill>
           <a:schemeClr val="tx1"/>
@@ -44,7 +44,7 @@
         <a:cs typeface="+mn-cs"/>
       </a:defRPr>
     </a:lvl3pPr>
-    <a:lvl4pPr marL="1371600" algn="l" defTabSz="457200" rtl="0" eaLnBrk="1" latinLnBrk="0" hangingPunct="1">
+    <a:lvl4pPr marL="1371600" algn="r" defTabSz="457200" rtl="1" eaLnBrk="1" latinLnBrk="0" hangingPunct="1">
       <a:defRPr sz="1800" kern="1200" lang="ar-SA">
         <a:solidFill>
           <a:schemeClr val="tx1"/>
@@ -54,7 +54,7 @@
         <a:cs typeface="+mn-cs"/>
       </a:defRPr>
     </a:lvl4pPr>
-    <a:lvl5pPr marL="1828800" algn="l" defTabSz="457200" rtl="0" eaLnBrk="1" latinLnBrk="0" hangingPunct="1">
+    <a:lvl5pPr marL="1828800" algn="r" defTabSz="457200" rtl="1" eaLnBrk="1" latinLnBrk="0" hangingPunct="1">
       <a:defRPr sz="1800" kern="1200" lang="ar-SA">
         <a:solidFill>
           <a:schemeClr val="tx1"/>
@@ -64,7 +64,7 @@
         <a:cs typeface="+mn-cs"/>
       </a:defRPr>
     </a:lvl5pPr>
-    <a:lvl6pPr marL="2286000" algn="l" defTabSz="457200" rtl="0" eaLnBrk="1" latinLnBrk="0" hangingPunct="1">
+    <a:lvl6pPr marL="2286000" algn="r" defTabSz="457200" rtl="1" eaLnBrk="1" latinLnBrk="0" hangingPunct="1">
       <a:defRPr sz="1800" kern="1200" lang="ar-SA">
         <a:solidFill>
           <a:schemeClr val="tx1"/>
@@ -74,7 +74,7 @@
         <a:cs typeface="+mn-cs"/>
       </a:defRPr>
     </a:lvl6pPr>
-    <a:lvl7pPr marL="2743200" algn="l" defTabSz="457200" rtl="0" eaLnBrk="1" latinLnBrk="0" hangingPunct="1">
+    <a:lvl7pPr marL="2743200" algn="r" defTabSz="457200" rtl="1" eaLnBrk="1" latinLnBrk="0" hangingPunct="1">
       <a:defRPr sz="1800" kern="1200" lang="ar-SA">
         <a:solidFill>
           <a:schemeClr val="tx1"/>
@@ -84,7 +84,7 @@
         <a:cs typeface="+mn-cs"/>
       </a:defRPr>
     </a:lvl7pPr>
-    <a:lvl8pPr marL="3200400" algn="l" defTabSz="457200" rtl="0" eaLnBrk="1" latinLnBrk="0" hangingPunct="1">
+    <a:lvl8pPr marL="3200400" algn="r" defTabSz="457200" rtl="1" eaLnBrk="1" latinLnBrk="0" hangingPunct="1">
       <a:defRPr sz="1800" kern="1200" lang="ar-SA">
         <a:solidFill>
           <a:schemeClr val="tx1"/>
@@ -94,7 +94,7 @@
         <a:cs typeface="+mn-cs"/>
       </a:defRPr>
     </a:lvl8pPr>
-    <a:lvl9pPr marL="3657600" algn="l" defTabSz="457200" rtl="0" eaLnBrk="1" latinLnBrk="0" hangingPunct="1">
+    <a:lvl9pPr marL="3657600" algn="r" defTabSz="457200" rtl="1" eaLnBrk="1" latinLnBrk="0" hangingPunct="1">
       <a:defRPr sz="1800" kern="1200" lang="ar-SA">
         <a:solidFill>
           <a:schemeClr val="tx1"/>
@@ -502,7 +502,9 @@
           <a:bodyPr/>
           <a:lstStyle/>
           <a:p>
+            <a:pPr algn="r" rtl="1"/>
             <a:r>
+              <a:rPr lang="ar-SA"/>
               <a:t>دليل سريع: اكتب داخل الحقول الإرشادية (لا تُطبع إن بقيت فارغة). لأسبوع جديد: Ctrl+D على هذه الشريحة فيزيد العداد تلقائيًا. للتصدير: ملف ← تصدير ← PDF ← خيارات ← الشريحة الحالية. التفاصيل في الشريحة المخفية الأخيرة.</a:t>
             </a:r>
           </a:p>
@@ -584,7 +586,7 @@
         <p:spPr>
           <a:xfrm>
             <a:off x="0" y="0"/>
-            <a:ext cx="7560000" cy="1656000"/>
+            <a:ext cx="7560000" cy="1584000"/>
           </a:xfrm>
           <a:prstGeom prst="rect">
             <a:avLst/>
@@ -613,16 +615,16 @@
         </p:nvCxnSpPr>
         <p:spPr>
           <a:xfrm flipV="1">
-            <a:off x="1638000" y="396000"/>
+            <a:off x="1422000" y="396000"/>
             <a:ext cx="198000" cy="234000"/>
           </a:xfrm>
           <a:prstGeom prst="line">
             <a:avLst/>
           </a:prstGeom>
-          <a:ln w="6350" cap="rnd">
+          <a:ln w="12700" cap="rnd">
             <a:solidFill>
               <a:srgbClr val="66CCFF">
-                <a:alpha val="30000"/>
+                <a:alpha val="45000"/>
               </a:srgbClr>
             </a:solidFill>
             <a:round/>
@@ -637,16 +639,16 @@
         </p:nvCxnSpPr>
         <p:spPr>
           <a:xfrm>
-            <a:off x="1836000" y="396000"/>
+            <a:off x="1620000" y="396000"/>
             <a:ext cx="216000" cy="126000"/>
           </a:xfrm>
           <a:prstGeom prst="line">
             <a:avLst/>
           </a:prstGeom>
-          <a:ln w="6350" cap="rnd">
+          <a:ln w="12700" cap="rnd">
             <a:solidFill>
               <a:srgbClr val="66CCFF">
-                <a:alpha val="30000"/>
+                <a:alpha val="45000"/>
               </a:srgbClr>
             </a:solidFill>
             <a:round/>
@@ -661,16 +663,16 @@
         </p:nvCxnSpPr>
         <p:spPr>
           <a:xfrm flipV="1">
-            <a:off x="2052000" y="234000"/>
+            <a:off x="1836000" y="234000"/>
             <a:ext cx="198000" cy="288000"/>
           </a:xfrm>
           <a:prstGeom prst="line">
             <a:avLst/>
           </a:prstGeom>
-          <a:ln w="6350" cap="rnd">
+          <a:ln w="12700" cap="rnd">
             <a:solidFill>
               <a:srgbClr val="66CCFF">
-                <a:alpha val="30000"/>
+                <a:alpha val="45000"/>
               </a:srgbClr>
             </a:solidFill>
             <a:round/>
@@ -685,16 +687,16 @@
         </p:nvCxnSpPr>
         <p:spPr>
           <a:xfrm>
-            <a:off x="2250000" y="234000"/>
+            <a:off x="2034000" y="234000"/>
             <a:ext cx="216000" cy="126000"/>
           </a:xfrm>
           <a:prstGeom prst="line">
             <a:avLst/>
           </a:prstGeom>
-          <a:ln w="6350" cap="rnd">
+          <a:ln w="12700" cap="rnd">
             <a:solidFill>
               <a:srgbClr val="66CCFF">
-                <a:alpha val="30000"/>
+                <a:alpha val="45000"/>
               </a:srgbClr>
             </a:solidFill>
             <a:round/>
@@ -709,16 +711,16 @@
         </p:nvCxnSpPr>
         <p:spPr>
           <a:xfrm flipV="1">
-            <a:off x="2466000" y="90000"/>
-            <a:ext cx="198000" cy="270000"/>
+            <a:off x="2250000" y="108000"/>
+            <a:ext cx="198000" cy="252000"/>
           </a:xfrm>
           <a:prstGeom prst="line">
             <a:avLst/>
           </a:prstGeom>
-          <a:ln w="6350" cap="rnd">
+          <a:ln w="12700" cap="rnd">
             <a:solidFill>
               <a:srgbClr val="66CCFF">
-                <a:alpha val="30000"/>
+                <a:alpha val="45000"/>
               </a:srgbClr>
             </a:solidFill>
             <a:round/>
@@ -733,16 +735,16 @@
         </p:nvCxnSpPr>
         <p:spPr>
           <a:xfrm>
-            <a:off x="2664000" y="90000"/>
-            <a:ext cx="198000" cy="162000"/>
+            <a:off x="2448000" y="108000"/>
+            <a:ext cx="198000" cy="144000"/>
           </a:xfrm>
           <a:prstGeom prst="line">
             <a:avLst/>
           </a:prstGeom>
-          <a:ln w="6350" cap="rnd">
+          <a:ln w="12700" cap="rnd">
             <a:solidFill>
               <a:srgbClr val="66CCFF">
-                <a:alpha val="30000"/>
+                <a:alpha val="45000"/>
               </a:srgbClr>
             </a:solidFill>
             <a:round/>
@@ -757,16 +759,16 @@
         </p:nvCxnSpPr>
         <p:spPr>
           <a:xfrm flipV="1">
-            <a:off x="2862000" y="28800"/>
-            <a:ext cx="180000" cy="223200"/>
+            <a:off x="2646000" y="93600"/>
+            <a:ext cx="180000" cy="158400"/>
           </a:xfrm>
           <a:prstGeom prst="line">
             <a:avLst/>
           </a:prstGeom>
-          <a:ln w="6350" cap="rnd">
+          <a:ln w="12700" cap="rnd">
             <a:solidFill>
               <a:srgbClr val="66CCFF">
-                <a:alpha val="30000"/>
+                <a:alpha val="45000"/>
               </a:srgbClr>
             </a:solidFill>
             <a:round/>
@@ -781,16 +783,16 @@
         </p:nvCxnSpPr>
         <p:spPr>
           <a:xfrm>
-            <a:off x="2052000" y="522000"/>
+            <a:off x="1836000" y="522000"/>
             <a:ext cx="126000" cy="252000"/>
           </a:xfrm>
           <a:prstGeom prst="line">
             <a:avLst/>
           </a:prstGeom>
-          <a:ln w="6350" cap="rnd">
+          <a:ln w="12700" cap="rnd">
             <a:solidFill>
               <a:srgbClr val="66CCFF">
-                <a:alpha val="30000"/>
+                <a:alpha val="45000"/>
               </a:srgbClr>
             </a:solidFill>
             <a:round/>
@@ -805,16 +807,16 @@
         </p:nvCxnSpPr>
         <p:spPr>
           <a:xfrm>
-            <a:off x="2466000" y="360000"/>
+            <a:off x="2250000" y="360000"/>
             <a:ext cx="108000" cy="234000"/>
           </a:xfrm>
           <a:prstGeom prst="line">
             <a:avLst/>
           </a:prstGeom>
-          <a:ln w="6350" cap="rnd">
+          <a:ln w="12700" cap="rnd">
             <a:solidFill>
               <a:srgbClr val="66CCFF">
-                <a:alpha val="30000"/>
+                <a:alpha val="45000"/>
               </a:srgbClr>
             </a:solidFill>
             <a:round/>
@@ -829,7 +831,7 @@
         </p:nvSpPr>
         <p:spPr>
           <a:xfrm>
-            <a:off x="1580400" y="572400"/>
+            <a:off x="1364400" y="572400"/>
             <a:ext cx="115200" cy="115200"/>
           </a:xfrm>
           <a:prstGeom prst="ellipse">
@@ -853,7 +855,7 @@
         </p:nvSpPr>
         <p:spPr>
           <a:xfrm>
-            <a:off x="1800000" y="360000"/>
+            <a:off x="1584000" y="360000"/>
             <a:ext cx="72000" cy="72000"/>
           </a:xfrm>
           <a:prstGeom prst="ellipse">
@@ -877,7 +879,7 @@
         </p:nvSpPr>
         <p:spPr>
           <a:xfrm>
-            <a:off x="2016000" y="486000"/>
+            <a:off x="1800000" y="486000"/>
             <a:ext cx="72000" cy="72000"/>
           </a:xfrm>
           <a:prstGeom prst="ellipse">
@@ -901,7 +903,7 @@
         </p:nvSpPr>
         <p:spPr>
           <a:xfrm>
-            <a:off x="2192400" y="176400"/>
+            <a:off x="1976400" y="176400"/>
             <a:ext cx="115200" cy="115200"/>
           </a:xfrm>
           <a:prstGeom prst="ellipse">
@@ -925,7 +927,7 @@
         </p:nvSpPr>
         <p:spPr>
           <a:xfrm>
-            <a:off x="2430000" y="324000"/>
+            <a:off x="2214000" y="324000"/>
             <a:ext cx="72000" cy="72000"/>
           </a:xfrm>
           <a:prstGeom prst="ellipse">
@@ -949,7 +951,7 @@
         </p:nvSpPr>
         <p:spPr>
           <a:xfrm>
-            <a:off x="2628000" y="54000"/>
+            <a:off x="2412000" y="72000"/>
             <a:ext cx="72000" cy="72000"/>
           </a:xfrm>
           <a:prstGeom prst="ellipse">
@@ -973,7 +975,7 @@
         </p:nvSpPr>
         <p:spPr>
           <a:xfrm>
-            <a:off x="2804400" y="194400"/>
+            <a:off x="2588400" y="194400"/>
             <a:ext cx="115200" cy="115200"/>
           </a:xfrm>
           <a:prstGeom prst="ellipse">
@@ -997,7 +999,7 @@
         </p:nvSpPr>
         <p:spPr>
           <a:xfrm>
-            <a:off x="3006000" y="-7200"/>
+            <a:off x="2790000" y="57600"/>
             <a:ext cx="72000" cy="72000"/>
           </a:xfrm>
           <a:prstGeom prst="ellipse">
@@ -1021,7 +1023,7 @@
         </p:nvSpPr>
         <p:spPr>
           <a:xfrm>
-            <a:off x="2142000" y="738000"/>
+            <a:off x="1926000" y="738000"/>
             <a:ext cx="72000" cy="72000"/>
           </a:xfrm>
           <a:prstGeom prst="ellipse">
@@ -1045,7 +1047,7 @@
         </p:nvSpPr>
         <p:spPr>
           <a:xfrm>
-            <a:off x="2516400" y="536400"/>
+            <a:off x="2300400" y="536400"/>
             <a:ext cx="115200" cy="115200"/>
           </a:xfrm>
           <a:prstGeom prst="ellipse">
@@ -1069,8 +1071,8 @@
         </p:nvSpPr>
         <p:spPr>
           <a:xfrm>
-            <a:off x="432000" y="216000"/>
-            <a:ext cx="1080000" cy="504000"/>
+            <a:off x="432000" y="180000"/>
+            <a:ext cx="1080000" cy="540000"/>
           </a:xfrm>
           <a:prstGeom prst="roundRect">
             <a:avLst>
@@ -1157,8 +1159,8 @@
         </p:nvSpPr>
         <p:spPr>
           <a:xfrm>
-            <a:off x="6624000" y="180000"/>
-            <a:ext cx="504000" cy="504000"/>
+            <a:off x="6588000" y="180000"/>
+            <a:ext cx="540000" cy="540000"/>
           </a:xfrm>
           <a:prstGeom prst="rect">
             <a:avLst/>
@@ -1374,7 +1376,7 @@
         </p:nvSpPr>
         <p:spPr>
           <a:xfrm>
-            <a:off x="4824000" y="1152000"/>
+            <a:off x="4824000" y="1116000"/>
             <a:ext cx="2304000" cy="162000"/>
           </a:xfrm>
           <a:prstGeom prst="rect">
@@ -1776,7 +1778,7 @@
         </p:nvSpPr>
         <p:spPr>
           <a:xfrm>
-            <a:off x="2628000" y="1152000"/>
+            <a:off x="2628000" y="1116000"/>
             <a:ext cx="2052000" cy="162000"/>
           </a:xfrm>
           <a:prstGeom prst="rect">
@@ -1953,7 +1955,7 @@
         </p:nvSpPr>
         <p:spPr>
           <a:xfrm>
-            <a:off x="432000" y="1152000"/>
+            <a:off x="432000" y="1116000"/>
             <a:ext cx="2052000" cy="162000"/>
           </a:xfrm>
           <a:prstGeom prst="rect">
@@ -2130,7 +2132,7 @@
         </p:nvSpPr>
         <p:spPr>
           <a:xfrm>
-            <a:off x="2520000" y="1872000"/>
+            <a:off x="2520000" y="1800000"/>
             <a:ext cx="4608000" cy="180000"/>
           </a:xfrm>
           <a:prstGeom prst="rect">
@@ -2182,8 +2184,8 @@
         </p:nvSpPr>
         <p:spPr>
           <a:xfrm>
-            <a:off x="2520000" y="2070000"/>
-            <a:ext cx="4608000" cy="954000"/>
+            <a:off x="2520000" y="1998000"/>
+            <a:ext cx="4608000" cy="864000"/>
           </a:xfrm>
           <a:prstGeom prst="rect">
             <a:avLst/>
@@ -2307,8 +2309,8 @@
         </p:nvSpPr>
         <p:spPr>
           <a:xfrm>
-            <a:off x="1440000" y="1872000"/>
-            <a:ext cx="864000" cy="1152000"/>
+            <a:off x="1440000" y="1800000"/>
+            <a:ext cx="864000" cy="1008000"/>
           </a:xfrm>
           <a:prstGeom prst="roundRect">
             <a:avLst>
@@ -2337,8 +2339,8 @@
         </p:nvSpPr>
         <p:spPr>
           <a:xfrm>
-            <a:off x="1440000" y="1944000"/>
-            <a:ext cx="864000" cy="684000"/>
+            <a:off x="1440000" y="1836000"/>
+            <a:ext cx="864000" cy="576000"/>
           </a:xfrm>
           <a:prstGeom prst="rect">
             <a:avLst/>
@@ -2462,7 +2464,7 @@
         </p:nvSpPr>
         <p:spPr>
           <a:xfrm>
-            <a:off x="1404000" y="2646000"/>
+            <a:off x="1404000" y="2466000"/>
             <a:ext cx="936000" cy="324000"/>
           </a:xfrm>
           <a:prstGeom prst="rect">
@@ -2510,8 +2512,8 @@
         </p:nvSpPr>
         <p:spPr>
           <a:xfrm>
-            <a:off x="432000" y="1872000"/>
-            <a:ext cx="864000" cy="1152000"/>
+            <a:off x="432000" y="1800000"/>
+            <a:ext cx="864000" cy="1008000"/>
           </a:xfrm>
           <a:prstGeom prst="roundRect">
             <a:avLst>
@@ -2540,8 +2542,8 @@
         </p:nvSpPr>
         <p:spPr>
           <a:xfrm>
-            <a:off x="432000" y="1944000"/>
-            <a:ext cx="864000" cy="684000"/>
+            <a:off x="432000" y="1836000"/>
+            <a:ext cx="864000" cy="576000"/>
           </a:xfrm>
           <a:prstGeom prst="rect">
             <a:avLst/>
@@ -2665,7 +2667,7 @@
         </p:nvSpPr>
         <p:spPr>
           <a:xfrm>
-            <a:off x="396000" y="2646000"/>
+            <a:off x="396000" y="2466000"/>
             <a:ext cx="936000" cy="324000"/>
           </a:xfrm>
           <a:prstGeom prst="rect">
@@ -2713,7 +2715,7 @@
         </p:nvSpPr>
         <p:spPr>
           <a:xfrm>
-            <a:off x="6984000" y="3369600"/>
+            <a:off x="6984000" y="3153600"/>
             <a:ext cx="144000" cy="144000"/>
           </a:xfrm>
           <a:prstGeom prst="ellipse">
@@ -2735,7 +2737,7 @@
         </p:nvSpPr>
         <p:spPr>
           <a:xfrm>
-            <a:off x="7029000" y="3414600"/>
+            <a:off x="7029000" y="3198600"/>
             <a:ext cx="54000" cy="54000"/>
           </a:xfrm>
           <a:prstGeom prst="ellipse">
@@ -2757,7 +2759,7 @@
         </p:nvSpPr>
         <p:spPr>
           <a:xfrm>
-            <a:off x="2214000" y="3297600"/>
+            <a:off x="2214000" y="3081600"/>
             <a:ext cx="4680000" cy="288000"/>
           </a:xfrm>
           <a:prstGeom prst="rect">
@@ -2809,8 +2811,8 @@
         </p:nvSpPr>
         <p:spPr>
           <a:xfrm>
-            <a:off x="432000" y="3582000"/>
-            <a:ext cx="6696000" cy="1872000"/>
+            <a:off x="432000" y="3366000"/>
+            <a:ext cx="6696000" cy="2052000"/>
           </a:xfrm>
           <a:prstGeom prst="rect">
             <a:avLst/>
@@ -2830,7 +2832,7 @@
                 <a:spcPts val="0"/>
               </a:spcBef>
               <a:spcAft>
-                <a:spcPts val="200"/>
+                <a:spcPts val="100"/>
               </a:spcAft>
               <a:buClr>
                 <a:srgbClr val="127A5B"/>
@@ -2854,7 +2856,7 @@
                 <a:spcPts val="0"/>
               </a:spcBef>
               <a:spcAft>
-                <a:spcPts val="200"/>
+                <a:spcPts val="100"/>
               </a:spcAft>
               <a:buClr>
                 <a:srgbClr val="5F6B7A"/>
@@ -2878,7 +2880,7 @@
                 <a:spcPts val="0"/>
               </a:spcBef>
               <a:spcAft>
-                <a:spcPts val="200"/>
+                <a:spcPts val="100"/>
               </a:spcAft>
               <a:buClr>
                 <a:srgbClr val="5F6B7A"/>
@@ -2902,7 +2904,7 @@
                 <a:spcPts val="0"/>
               </a:spcBef>
               <a:spcAft>
-                <a:spcPts val="200"/>
+                <a:spcPts val="100"/>
               </a:spcAft>
               <a:buClr>
                 <a:srgbClr val="5F6B7A"/>
@@ -2926,7 +2928,7 @@
                 <a:spcPts val="0"/>
               </a:spcBef>
               <a:spcAft>
-                <a:spcPts val="200"/>
+                <a:spcPts val="100"/>
               </a:spcAft>
               <a:buClr>
                 <a:srgbClr val="5F6B7A"/>
@@ -2946,7 +2948,7 @@
           <a:p>
             <a:r>
               <a:rPr lang="ar-SA" dirty="0"/>
-              <a:t>مهمة في كل سطر: اسم المهمة — النتيجة أو الأثر (برقم إن أمكن). خمسة بنود كحد أقصى.</a:t>
+              <a:t>مهمة في كل سطر: اسم المهمة — النتيجة أو الأثر (برقم إن أمكن). ثمانية بنود كحد أقصى.</a:t>
             </a:r>
           </a:p>
         </p:txBody>
@@ -2959,7 +2961,7 @@
         </p:nvSpPr>
         <p:spPr>
           <a:xfrm>
-            <a:off x="6984000" y="5745600"/>
+            <a:off x="6984000" y="5673600"/>
             <a:ext cx="144000" cy="144000"/>
           </a:xfrm>
           <a:prstGeom prst="ellipse">
@@ -2981,7 +2983,7 @@
         </p:nvSpPr>
         <p:spPr>
           <a:xfrm>
-            <a:off x="7029000" y="5790600"/>
+            <a:off x="7029000" y="5718600"/>
             <a:ext cx="54000" cy="54000"/>
           </a:xfrm>
           <a:prstGeom prst="ellipse">
@@ -3003,7 +3005,7 @@
         </p:nvSpPr>
         <p:spPr>
           <a:xfrm>
-            <a:off x="2214000" y="5673600"/>
+            <a:off x="2214000" y="5601600"/>
             <a:ext cx="4680000" cy="288000"/>
           </a:xfrm>
           <a:prstGeom prst="rect">
@@ -3051,8 +3053,8 @@
         </p:nvSpPr>
         <p:spPr>
           <a:xfrm>
-            <a:off x="432000" y="8532000"/>
-            <a:ext cx="6696000" cy="1080000"/>
+            <a:off x="432000" y="8388000"/>
+            <a:ext cx="6696000" cy="1152000"/>
           </a:xfrm>
           <a:prstGeom prst="roundRect">
             <a:avLst>
@@ -3077,7 +3079,7 @@
         </p:nvSpPr>
         <p:spPr>
           <a:xfrm>
-            <a:off x="576000" y="8604000"/>
+            <a:off x="576000" y="8460000"/>
             <a:ext cx="6408000" cy="234000"/>
           </a:xfrm>
           <a:prstGeom prst="rect">
@@ -3129,8 +3131,8 @@
         </p:nvSpPr>
         <p:spPr>
           <a:xfrm>
-            <a:off x="576000" y="8874000"/>
-            <a:ext cx="6408000" cy="666000"/>
+            <a:off x="576000" y="8730000"/>
+            <a:ext cx="6408000" cy="738000"/>
           </a:xfrm>
           <a:prstGeom prst="rect">
             <a:avLst/>
@@ -3241,7 +3243,7 @@
           <a:p>
             <a:r>
               <a:rPr lang="ar-SA" dirty="0"/>
-              <a:t>جملة واحدة: السبب ← الأثر ← الموعد الجديد ← هل يحتاج تدخّلك؟ (اتركه فارغًا إن لم يوجد)</a:t>
+              <a:t>جملة واحدة: السبب ← الأثر ← الموعد الجديد ← هل يحتاج تدخّل المدير؟ (إن لم يوجد، اكتب: لا توجد تحديات)</a:t>
             </a:r>
           </a:p>
         </p:txBody>
@@ -4011,7 +4013,7 @@
           <p:nvPr/>
         </p:nvGraphicFramePr>
         <p:xfrm>
-          <a:off x="432000" y="5958000"/>
+          <a:off x="432000" y="5886000"/>
           <a:ext cx="6696000" cy="2214000"/>
         </p:xfrm>
         <a:graphic>
@@ -6402,7 +6404,7 @@
                 <a:latin typeface="IBM Plex Sans Arabic"/>
                 <a:cs typeface="IBM Plex Sans Arabic"/>
               </a:rPr>
-              <a:t>ابدأ كل مهمة بالنتيجة لا بالنشاط («نُشرت اللوحة واعتمدتها 3 إدارات» بدل «عملت على اللوحة»). سبعة بنود كحد أقصى في المنجز وستة صفوف في الجدول. الأعداد في الخلاصة تطابق البطاقات وحالات الجدول. التحديات: السبب ← الأثر ← الموعد الجديد ← هل يحتاج تدخّلك؟ واكتب «لا توجد تحديات» إن لم توجد.</a:t>
+              <a:t>ابدأ كل مهمة بالنتيجة لا بالنشاط («نُشرت اللوحة واعتمدتها 3 إدارات» بدل «عملت على اللوحة»). ثمانية بنود كحد أقصى في المنجز وستة صفوف في الجدول. الأعداد في الخلاصة تطابق البطاقات وحالات الجدول. التحديات: السبب ← الأثر ← الموعد الجديد ← هل يحتاج تدخّل المدير؟ واكتب «لا توجد تحديات» إن لم توجد.</a:t>
             </a:r>
           </a:p>
         </p:txBody>
